--- a/curso/pptx/S31.pptx
+++ b/curso/pptx/S31.pptx
@@ -7015,7 +7015,7 @@
                 </a:solidFill>
                 <a:latin typeface="Nunito Sans"/>
               </a:rPr>
-              <a:t>Fuente original:</a:t>
+              <a:t>原始来源：</a:t>
             </a:r>
             <a:r>
               <a:rPr sz="2800" b="0">
@@ -7024,7 +7024,7 @@
                 </a:solidFill>
                 <a:latin typeface="Nunito Sans"/>
               </a:rPr>
-              <a:t> quien lo vio, lo midió o lo decidió</a:t>
+              <a:t>亲眼看到、亲自测量或者亲自决定的人</a:t>
             </a:r>
           </a:p>
           <a:p>
@@ -7049,7 +7049,7 @@
                 </a:solidFill>
                 <a:latin typeface="Nunito Sans"/>
               </a:rPr>
-              <a:t>De segunda mano:</a:t>
+              <a:t>二手来源：</a:t>
             </a:r>
             <a:r>
               <a:rPr sz="2800" b="0">
@@ -7058,7 +7058,7 @@
                 </a:solidFill>
                 <a:latin typeface="Nunito Sans"/>
               </a:rPr>
-              <a:t> quien lo cuenta después</a:t>
+              <a:t>之后再转述的人</a:t>
             </a:r>
           </a:p>
           <a:p>
@@ -7083,7 +7083,7 @@
                 </a:solidFill>
                 <a:latin typeface="Nunito Sans"/>
               </a:rPr>
-              <a:t>Cuanto más lejos del original, más fácil que cambie</a:t>
+              <a:t>离原始来源越远，越容易走样</a:t>
             </a:r>
           </a:p>
         </p:txBody>
@@ -7631,7 +7631,7 @@
                 </a:solidFill>
                 <a:latin typeface="Nunito Sans"/>
               </a:rPr>
-              <a:t>Sin autor ni fecha</a:t>
+              <a:t>没有作者，没有日期</a:t>
             </a:r>
           </a:p>
           <a:p>
@@ -7656,7 +7656,7 @@
                 </a:solidFill>
                 <a:latin typeface="Nunito Sans"/>
               </a:rPr>
-              <a:t>No dice de dónde saca los datos</a:t>
+              <a:t>没有说数据是从哪里来的</a:t>
             </a:r>
           </a:p>
           <a:p>
@@ -7681,7 +7681,7 @@
                 </a:solidFill>
                 <a:latin typeface="Nunito Sans"/>
               </a:rPr>
-              <a:t>Quiere que compres, votes o compartas ya</a:t>
+              <a:t>想让你马上就买、投票或者转发</a:t>
             </a:r>
           </a:p>
         </p:txBody>
@@ -7811,7 +7811,7 @@
                 </a:solidFill>
                 <a:latin typeface="Nunito Sans"/>
               </a:rPr>
-              <a:t>Autor con nombre y oficio</a:t>
+              <a:t>作者有名字和职业</a:t>
             </a:r>
           </a:p>
           <a:p>
@@ -7836,7 +7836,7 @@
                 </a:solidFill>
                 <a:latin typeface="Nunito Sans"/>
               </a:rPr>
-              <a:t>Enlaza a sus fuentes</a:t>
+              <a:t>附有它的来源链接</a:t>
             </a:r>
           </a:p>
           <a:p>
@@ -7861,7 +7861,7 @@
                 </a:solidFill>
                 <a:latin typeface="Nunito Sans"/>
               </a:rPr>
-              <a:t>Ha acertado otras veces en ese tema</a:t>
+              <a:t>在这个话题上以前说得准</a:t>
             </a:r>
           </a:p>
           <a:p>
@@ -7886,7 +7886,7 @@
                 </a:solidFill>
                 <a:latin typeface="Nunito Sans"/>
               </a:rPr>
-              <a:t>Corrige sus errores en público</a:t>
+              <a:t>公开纠正自己的错误</a:t>
             </a:r>
           </a:p>
         </p:txBody>

--- a/curso/pptx/S31.pptx
+++ b/curso/pptx/S31.pptx
@@ -4437,7 +4437,7 @@
                 </a:solidFill>
                 <a:latin typeface="Nunito Sans"/>
               </a:rPr>
-              <a:t>Leire 在查关于热浪的信息。她找到了一个没有作者的博客，和一家报纸的新闻，里面有国家气象局的数据。</a:t>
+              <a:t>一个女孩在查关于热浪的信息。她找到了一个没有作者的博客，和一家报纸的新闻，里面有国家气象局的数据。</a:t>
             </a:r>
           </a:p>
         </p:txBody>
